--- a/dist/초1/사회·역사/나와학교/초1_사회·역사_나와학교_02_함께지킬약속.pptx
+++ b/dist/초1/사회·역사/나와학교/초1_사회·역사_나와학교_02_함께지킬약속.pptx
@@ -119,19 +119,19 @@
   <p:extLst>
     <p:ext uri="{521415D9-36F7-43E2-AB2F-B90AF26B5E84}">
       <p14:sectionLst xmlns:p14="http://schemas.microsoft.com/office/powerpoint/2010/main">
-        <p14:section name="도입" id="{ec0cc120-0dde-094d-cb06-7deac502eaf1}">
+        <p14:section name="도입" id="{3a7f693b-0d03-3ac2-df95-f4ab8d1ccda6}">
           <p14:sldIdLst>
             <p14:sldId id="256"/>
             <p14:sldId id="257"/>
           </p14:sldIdLst>
         </p14:section>
-        <p14:section name="개념" id="{cdc31f49-b5d8-bec6-8de2-2c2fdf1aa230}">
+        <p14:section name="개념" id="{8aa76cb5-2473-3612-2462-c9709913dfdd}">
           <p14:sldIdLst>
             <p14:sldId id="258"/>
             <p14:sldId id="259"/>
           </p14:sldIdLst>
         </p14:section>
-        <p14:section name="연습" id="{9b6300bd-39e6-0b23-d544-340df49074d2}">
+        <p14:section name="연습" id="{9ac5858b-6e6d-c646-f1a2-e5ab96a6f77a}">
           <p14:sldIdLst>
             <p14:sldId id="260"/>
             <p14:sldId id="261"/>
@@ -139,19 +139,19 @@
             <p14:sldId id="263"/>
           </p14:sldIdLst>
         </p14:section>
-        <p14:section name="확인" id="{9b5aa433-913d-8310-ac74-e55f2b3c9f8b}">
+        <p14:section name="확인" id="{2761edb1-dda5-3826-6b0e-963faa343235}">
           <p14:sldIdLst>
             <p14:sldId id="264"/>
             <p14:sldId id="265"/>
             <p14:sldId id="266"/>
           </p14:sldIdLst>
         </p14:section>
-        <p14:section name="정리" id="{fc74e475-87ec-8004-d1d6-6b524caab9b3}">
+        <p14:section name="정리" id="{0500137e-bd49-6910-ad0d-e918053233f0}">
           <p14:sldIdLst>
             <p14:sldId id="267"/>
           </p14:sldIdLst>
         </p14:section>
-        <p14:section name="보충" id="{40a5dda3-d32f-5108-104a-cc8e65d82c04}">
+        <p14:section name="보충" id="{293ef99a-f618-ad2c-f46a-66e492710263}">
           <p14:sldIdLst>
             <p14:sldId id="268"/>
           </p14:sldIdLst>
